--- a/dist/초1/수학/수와연산/초1_수학_수와연산_02_수의순서와크기비교_학생용.pptx
+++ b/dist/초1/수학/수와연산/초1_수학_수와연산_02_수의순서와크기비교_학생용.pptx
@@ -119,13 +119,13 @@
   <p:extLst>
     <p:ext uri="{521415D9-36F7-43E2-AB2F-B90AF26B5E84}">
       <p14:sectionLst xmlns:p14="http://schemas.microsoft.com/office/powerpoint/2010/main">
-        <p14:section name="도입" id="{fc84076e-5d6c-cfd9-28e7-44572bceebb4}">
+        <p14:section name="도입" id="{4623b66f-19cf-8157-e575-68b8f96c3cb4}">
           <p14:sldIdLst>
             <p14:sldId id="256"/>
             <p14:sldId id="257"/>
           </p14:sldIdLst>
         </p14:section>
-        <p14:section name="개념" id="{cfca648e-dc5a-b1ea-82c9-188e105699e5}">
+        <p14:section name="개념" id="{6c6e0664-4cea-85fa-3ad7-c7d56268eb27}">
           <p14:sldIdLst>
             <p14:sldId id="258"/>
             <p14:sldId id="259"/>
@@ -133,25 +133,25 @@
             <p14:sldId id="261"/>
           </p14:sldIdLst>
         </p14:section>
-        <p14:section name="연습" id="{f0e8c7d5-4f78-0060-3eb5-82523dcf82e5}">
+        <p14:section name="연습" id="{3ca9a135-2ab5-a3ab-4a58-89ff44948e2c}">
           <p14:sldIdLst>
             <p14:sldId id="262"/>
             <p14:sldId id="263"/>
             <p14:sldId id="264"/>
           </p14:sldIdLst>
         </p14:section>
-        <p14:section name="확인" id="{e0b4b7a8-d4d7-a4a5-12c9-f46b5cda9f36}">
+        <p14:section name="확인" id="{6e904aa0-d696-41aa-7e55-051eb98e9308}">
           <p14:sldIdLst>
             <p14:sldId id="265"/>
             <p14:sldId id="266"/>
           </p14:sldIdLst>
         </p14:section>
-        <p14:section name="정리" id="{4c12d5e4-a01c-f3b7-1d26-12100e10e3a9}">
+        <p14:section name="정리" id="{abafa961-227a-d9eb-52df-4afbc1f87b25}">
           <p14:sldIdLst>
             <p14:sldId id="267"/>
           </p14:sldIdLst>
         </p14:section>
-        <p14:section name="보충" id="{7a35d89c-7190-f74f-60ff-842746dab2eb}">
+        <p14:section name="보충" id="{8cecc6d0-c2ee-6965-b286-cb5c38a29499}">
           <p14:sldIdLst>
             <p14:sldId id="268"/>
           </p14:sldIdLst>
@@ -2695,7 +2695,7 @@
           <a:bodyPr wrap="square" lIns="0" tIns="0" rIns="0" bIns="0" rtlCol="0" anchor="ctr"/>
           <a:lstStyle/>
           <a:p>
-            <a:pPr algn="l" indent="0" marL="0">
+            <a:pPr eaLnBrk="0" algn="l" indent="0" marL="0">
               <a:buNone/>
             </a:pPr>
             <a:r>
@@ -2736,7 +2736,7 @@
           <a:bodyPr wrap="square" lIns="0" tIns="0" rIns="0" bIns="0" rtlCol="0" anchor="t"/>
           <a:lstStyle/>
           <a:p>
-            <a:pPr indent="0" marL="0">
+            <a:pPr eaLnBrk="0" indent="0" marL="0">
               <a:buNone/>
             </a:pPr>
             <a:r>
@@ -3081,7 +3081,7 @@
       </p:sp>
       <p:sp>
         <p:nvSpPr>
-          <p:cNvPr id="17" name="S01-figure14" descr="십 칸 틀에 3개"/>
+          <p:cNvPr id="17" name="S01-figure14" descr="1개의 십 칸 틀 중 1번째: 모두 3개"/>
           <p:cNvSpPr/>
           <p:nvPr/>
         </p:nvSpPr>
@@ -3483,7 +3483,7 @@
       </p:sp>
       <p:sp>
         <p:nvSpPr>
-          <p:cNvPr id="33" name="S01-figure30" descr="십 칸 틀에 5개"/>
+          <p:cNvPr id="33" name="S01-figure30" descr="1개의 십 칸 틀 중 1번째: 모두 5개"/>
           <p:cNvSpPr/>
           <p:nvPr/>
         </p:nvSpPr>
@@ -3556,7 +3556,7 @@
           <a:bodyPr wrap="square" lIns="0" tIns="0" rIns="0" bIns="0" rtlCol="0" anchor="ctr"/>
           <a:lstStyle/>
           <a:p>
-            <a:pPr indent="0" marL="0">
+            <a:pPr eaLnBrk="0" indent="0" marL="0">
               <a:spcAft>
                 <a:spcPts val="600"/>
               </a:spcAft>
@@ -3576,7 +3576,7 @@
             <a:endParaRPr lang="ko-KR" sz="3200" dirty="0"/>
           </a:p>
           <a:p>
-            <a:pPr indent="0" marL="0">
+            <a:pPr eaLnBrk="0" indent="0" marL="0">
               <a:spcAft>
                 <a:spcPts val="600"/>
               </a:spcAft>
@@ -3596,7 +3596,7 @@
             <a:endParaRPr lang="ko-KR" sz="3200" dirty="0"/>
           </a:p>
           <a:p>
-            <a:pPr indent="0" marL="0">
+            <a:pPr eaLnBrk="0" indent="0" marL="0">
               <a:spcAft>
                 <a:spcPts val="600"/>
               </a:spcAft>
@@ -3616,7 +3616,7 @@
             <a:endParaRPr lang="ko-KR" sz="3200" dirty="0"/>
           </a:p>
           <a:p>
-            <a:pPr indent="0" marL="0">
+            <a:pPr eaLnBrk="0" indent="0" marL="0">
               <a:spcAft>
                 <a:spcPts val="600"/>
               </a:spcAft>
@@ -3685,7 +3685,7 @@
           <a:bodyPr wrap="square" lIns="0" tIns="0" rIns="0" bIns="0" rtlCol="0" anchor="ctr"/>
           <a:lstStyle/>
           <a:p>
-            <a:pPr algn="l" indent="0" marL="0">
+            <a:pPr eaLnBrk="0" algn="l" indent="0" marL="0">
               <a:buNone/>
             </a:pPr>
             <a:r>
@@ -3724,7 +3724,7 @@
           <a:bodyPr wrap="square" lIns="0" tIns="0" rIns="0" bIns="0" rtlCol="0" anchor="ctr"/>
           <a:lstStyle/>
           <a:p>
-            <a:pPr algn="l" indent="0" marL="0">
+            <a:pPr eaLnBrk="0" algn="l" indent="0" marL="0">
               <a:buNone/>
             </a:pPr>
             <a:r>
@@ -3771,7 +3771,7 @@
           <a:bodyPr wrap="square" lIns="0" tIns="0" rIns="0" bIns="0" rtlCol="0" anchor="ctr"/>
           <a:lstStyle/>
           <a:p>
-            <a:pPr algn="ctr" indent="0" marL="0">
+            <a:pPr eaLnBrk="0" algn="ctr" indent="0" marL="0">
               <a:buNone/>
             </a:pPr>
             <a:r>
@@ -3810,7 +3810,7 @@
           <a:bodyPr wrap="square" lIns="0" tIns="0" rIns="0" bIns="0" rtlCol="0" anchor="ctr"/>
           <a:lstStyle/>
           <a:p>
-            <a:pPr algn="l" indent="0" marL="0">
+            <a:pPr eaLnBrk="0" algn="l" indent="0" marL="0">
               <a:buNone/>
             </a:pPr>
             <a:r>
@@ -3857,7 +3857,7 @@
           <a:bodyPr wrap="square" lIns="0" tIns="0" rIns="0" bIns="0" rtlCol="0" anchor="ctr"/>
           <a:lstStyle/>
           <a:p>
-            <a:pPr algn="ctr" indent="0" marL="0">
+            <a:pPr eaLnBrk="0" algn="ctr" indent="0" marL="0">
               <a:buNone/>
             </a:pPr>
             <a:r>
@@ -3896,7 +3896,7 @@
           <a:bodyPr wrap="square" lIns="0" tIns="0" rIns="0" bIns="0" rtlCol="0" anchor="ctr"/>
           <a:lstStyle/>
           <a:p>
-            <a:pPr algn="l" indent="0" marL="0">
+            <a:pPr eaLnBrk="0" algn="l" indent="0" marL="0">
               <a:buNone/>
             </a:pPr>
             <a:r>
@@ -3943,7 +3943,7 @@
           <a:bodyPr wrap="square" lIns="0" tIns="0" rIns="0" bIns="0" rtlCol="0" anchor="ctr"/>
           <a:lstStyle/>
           <a:p>
-            <a:pPr algn="ctr" indent="0" marL="0">
+            <a:pPr eaLnBrk="0" algn="ctr" indent="0" marL="0">
               <a:buNone/>
             </a:pPr>
             <a:r>
@@ -3982,7 +3982,7 @@
           <a:bodyPr wrap="square" lIns="0" tIns="0" rIns="0" bIns="0" rtlCol="0" anchor="ctr"/>
           <a:lstStyle/>
           <a:p>
-            <a:pPr algn="l" indent="0" marL="0">
+            <a:pPr eaLnBrk="0" algn="l" indent="0" marL="0">
               <a:buNone/>
             </a:pPr>
             <a:r>
@@ -4039,7 +4039,7 @@
             </a:lvl1pPr>
           </a:lstStyle>
           <a:p>
-            <a:pPr algn="r"/>
+            <a:pPr eaLnBrk="0" algn="r"/>
             <a:fld id="{F7021451-1387-4CA6-816F-3879F97B5CBC}" type="slidenum">
               <a:rPr b="0" lang="en-US"/>
               <a:t>10</a:t>
@@ -4096,7 +4096,7 @@
           <a:bodyPr wrap="square" lIns="0" tIns="0" rIns="0" bIns="0" rtlCol="0" anchor="ctr"/>
           <a:lstStyle/>
           <a:p>
-            <a:pPr algn="l" indent="0" marL="0">
+            <a:pPr eaLnBrk="0" algn="l" indent="0" marL="0">
               <a:buNone/>
             </a:pPr>
             <a:r>
@@ -4162,7 +4162,7 @@
           <a:bodyPr wrap="square" lIns="0" tIns="0" rIns="0" bIns="0" rtlCol="0" anchor="ctr"/>
           <a:lstStyle/>
           <a:p>
-            <a:pPr indent="0" marL="0">
+            <a:pPr eaLnBrk="0" indent="0" marL="0">
               <a:spcAft>
                 <a:spcPts val="600"/>
               </a:spcAft>
@@ -4212,7 +4212,7 @@
           <a:bodyPr wrap="square" lIns="0" tIns="0" rIns="0" bIns="0" rtlCol="0" anchor="ctr"/>
           <a:lstStyle/>
           <a:p>
-            <a:pPr algn="ctr" indent="0" marL="0">
+            <a:pPr eaLnBrk="0" algn="ctr" indent="0" marL="0">
               <a:buNone/>
             </a:pPr>
             <a:r>
@@ -4682,7 +4682,7 @@
       </p:sp>
       <p:sp>
         <p:nvSpPr>
-          <p:cNvPr id="24" name="S12-figure291" descr="십 칸 틀에 8개"/>
+          <p:cNvPr id="24" name="S12-figure291" descr="1개의 십 칸 틀 중 1번째: 모두 8개"/>
           <p:cNvSpPr/>
           <p:nvPr/>
         </p:nvSpPr>
@@ -4736,7 +4736,7 @@
           <a:bodyPr wrap="square" lIns="0" tIns="0" rIns="0" bIns="0" rtlCol="0" anchor="ctr"/>
           <a:lstStyle/>
           <a:p>
-            <a:pPr algn="ctr" indent="0" marL="0">
+            <a:pPr eaLnBrk="0" algn="ctr" indent="0" marL="0">
               <a:buNone/>
             </a:pPr>
             <a:r>
@@ -5156,7 +5156,7 @@
       </p:sp>
       <p:sp>
         <p:nvSpPr>
-          <p:cNvPr id="42" name="S12-figure309" descr="십 칸 틀에 6개"/>
+          <p:cNvPr id="42" name="S12-figure309" descr="1개의 십 칸 틀 중 1번째: 모두 6개"/>
           <p:cNvSpPr/>
           <p:nvPr/>
         </p:nvSpPr>
@@ -5210,7 +5210,7 @@
           <a:bodyPr wrap="square" lIns="0" tIns="0" rIns="0" bIns="0" rtlCol="0" anchor="ctr"/>
           <a:lstStyle/>
           <a:p>
-            <a:pPr algn="ctr" indent="0" marL="0">
+            <a:pPr eaLnBrk="0" algn="ctr" indent="0" marL="0">
               <a:buNone/>
             </a:pPr>
             <a:r>
@@ -5655,7 +5655,7 @@
       </p:sp>
       <p:sp>
         <p:nvSpPr>
-          <p:cNvPr id="61" name="S12-figure328" descr="십 칸 틀에 7개"/>
+          <p:cNvPr id="61" name="S12-figure328" descr="1개의 십 칸 틀 중 1번째: 모두 7개"/>
           <p:cNvSpPr/>
           <p:nvPr/>
         </p:nvSpPr>
@@ -5719,7 +5719,7 @@
             </a:lvl1pPr>
           </a:lstStyle>
           <a:p>
-            <a:pPr algn="r"/>
+            <a:pPr eaLnBrk="0" algn="r"/>
             <a:fld id="{F7021451-1387-4CA6-816F-3879F97B5CBC}" type="slidenum">
               <a:rPr b="0" lang="en-US"/>
               <a:t>11</a:t>
@@ -5776,7 +5776,7 @@
           <a:bodyPr wrap="square" lIns="0" tIns="0" rIns="0" bIns="0" rtlCol="0" anchor="ctr"/>
           <a:lstStyle/>
           <a:p>
-            <a:pPr algn="l" indent="0" marL="0">
+            <a:pPr eaLnBrk="0" algn="l" indent="0" marL="0">
               <a:buNone/>
             </a:pPr>
             <a:r>
@@ -5842,7 +5842,7 @@
           <a:bodyPr wrap="square" lIns="0" tIns="0" rIns="0" bIns="0" rtlCol="0" anchor="ctr"/>
           <a:lstStyle/>
           <a:p>
-            <a:pPr indent="0" marL="0">
+            <a:pPr eaLnBrk="0" indent="0" marL="0">
               <a:spcAft>
                 <a:spcPts val="600"/>
               </a:spcAft>
@@ -5892,7 +5892,7 @@
           <a:bodyPr wrap="square" lIns="177800" tIns="0" rIns="177800" bIns="0" rtlCol="0" anchor="ctr"/>
           <a:lstStyle/>
           <a:p>
-            <a:pPr algn="l" indent="0" marL="0">
+            <a:pPr eaLnBrk="0" algn="l" indent="0" marL="0">
               <a:buNone/>
             </a:pPr>
             <a:r>
@@ -5939,7 +5939,7 @@
           <a:bodyPr wrap="square" lIns="177800" tIns="0" rIns="177800" bIns="0" rtlCol="0" anchor="ctr"/>
           <a:lstStyle/>
           <a:p>
-            <a:pPr algn="l" indent="0" marL="0">
+            <a:pPr eaLnBrk="0" algn="l" indent="0" marL="0">
               <a:buNone/>
             </a:pPr>
             <a:r>
@@ -5978,7 +5978,7 @@
           <a:bodyPr wrap="square" lIns="0" tIns="0" rIns="0" bIns="0" rtlCol="0" anchor="t"/>
           <a:lstStyle/>
           <a:p>
-            <a:pPr algn="l" indent="0" marL="0">
+            <a:pPr eaLnBrk="0" algn="l" indent="0" marL="0">
               <a:buNone/>
             </a:pPr>
             <a:r>
@@ -6017,7 +6017,7 @@
           <a:bodyPr wrap="square" lIns="0" tIns="0" rIns="0" bIns="0" rtlCol="0" anchor="ctr"/>
           <a:lstStyle/>
           <a:p>
-            <a:pPr algn="l" indent="0" marL="0">
+            <a:pPr eaLnBrk="0" algn="l" indent="0" marL="0">
               <a:buNone/>
             </a:pPr>
             <a:r>
@@ -6056,7 +6056,7 @@
           <a:bodyPr wrap="square" lIns="0" tIns="0" rIns="0" bIns="0" rtlCol="0" anchor="ctr"/>
           <a:lstStyle/>
           <a:p>
-            <a:pPr algn="l" indent="0" marL="0">
+            <a:pPr eaLnBrk="0" algn="l" indent="0" marL="0">
               <a:buNone/>
             </a:pPr>
             <a:r>
@@ -6095,7 +6095,7 @@
           <a:bodyPr wrap="square" lIns="0" tIns="0" rIns="0" bIns="0" rtlCol="0" anchor="ctr"/>
           <a:lstStyle/>
           <a:p>
-            <a:pPr algn="l" indent="0" marL="0">
+            <a:pPr eaLnBrk="0" algn="l" indent="0" marL="0">
               <a:buNone/>
             </a:pPr>
             <a:r>
@@ -6134,7 +6134,7 @@
           <a:bodyPr wrap="square" lIns="0" tIns="0" rIns="0" bIns="0" rtlCol="0" anchor="ctr"/>
           <a:lstStyle/>
           <a:p>
-            <a:pPr algn="l" indent="0" marL="0">
+            <a:pPr eaLnBrk="0" algn="l" indent="0" marL="0">
               <a:buNone/>
             </a:pPr>
             <a:r>
@@ -6191,7 +6191,7 @@
             </a:lvl1pPr>
           </a:lstStyle>
           <a:p>
-            <a:pPr algn="r"/>
+            <a:pPr eaLnBrk="0" algn="r"/>
             <a:fld id="{F7021451-1387-4CA6-816F-3879F97B5CBC}" type="slidenum">
               <a:rPr b="0" lang="en-US"/>
               <a:t>12</a:t>
@@ -6248,7 +6248,7 @@
           <a:bodyPr wrap="square" lIns="0" tIns="0" rIns="0" bIns="0" rtlCol="0" anchor="ctr"/>
           <a:lstStyle/>
           <a:p>
-            <a:pPr algn="l" indent="0" marL="0">
+            <a:pPr eaLnBrk="0" algn="l" indent="0" marL="0">
               <a:buNone/>
             </a:pPr>
             <a:r>
@@ -6314,7 +6314,7 @@
           <a:bodyPr wrap="square" lIns="0" tIns="0" rIns="0" bIns="0" rtlCol="0" anchor="ctr"/>
           <a:lstStyle/>
           <a:p>
-            <a:pPr indent="0" marL="0">
+            <a:pPr eaLnBrk="0" indent="0" marL="0">
               <a:spcAft>
                 <a:spcPts val="600"/>
               </a:spcAft>
@@ -6612,7 +6612,7 @@
       </p:sp>
       <p:sp>
         <p:nvSpPr>
-          <p:cNvPr id="16" name="S14-figure351" descr="십 칸 틀에 1개"/>
+          <p:cNvPr id="16" name="S14-figure351" descr="1개의 십 칸 틀 중 1번째: 모두 1개"/>
           <p:cNvSpPr/>
           <p:nvPr/>
         </p:nvSpPr>
@@ -6658,7 +6658,7 @@
           <a:bodyPr wrap="square" lIns="0" tIns="0" rIns="0" bIns="0" rtlCol="0" anchor="ctr"/>
           <a:lstStyle/>
           <a:p>
-            <a:pPr algn="ctr" indent="0" marL="0">
+            <a:pPr eaLnBrk="0" algn="ctr" indent="0" marL="0">
               <a:buNone/>
             </a:pPr>
             <a:r>
@@ -6978,7 +6978,7 @@
       </p:sp>
       <p:sp>
         <p:nvSpPr>
-          <p:cNvPr id="30" name="S14-figure365" descr="십 칸 틀에 2개"/>
+          <p:cNvPr id="30" name="S14-figure365" descr="1개의 십 칸 틀 중 1번째: 모두 2개"/>
           <p:cNvSpPr/>
           <p:nvPr/>
         </p:nvSpPr>
@@ -7024,7 +7024,7 @@
           <a:bodyPr wrap="square" lIns="0" tIns="0" rIns="0" bIns="0" rtlCol="0" anchor="ctr"/>
           <a:lstStyle/>
           <a:p>
-            <a:pPr algn="ctr" indent="0" marL="0">
+            <a:pPr eaLnBrk="0" algn="ctr" indent="0" marL="0">
               <a:buNone/>
             </a:pPr>
             <a:r>
@@ -7369,7 +7369,7 @@
       </p:sp>
       <p:sp>
         <p:nvSpPr>
-          <p:cNvPr id="45" name="S14-figure380" descr="십 칸 틀에 3개"/>
+          <p:cNvPr id="45" name="S14-figure380" descr="1개의 십 칸 틀 중 1번째: 모두 3개"/>
           <p:cNvSpPr/>
           <p:nvPr/>
         </p:nvSpPr>
@@ -7415,7 +7415,7 @@
           <a:bodyPr wrap="square" lIns="0" tIns="0" rIns="0" bIns="0" rtlCol="0" anchor="ctr"/>
           <a:lstStyle/>
           <a:p>
-            <a:pPr algn="ctr" indent="0" marL="0">
+            <a:pPr eaLnBrk="0" algn="ctr" indent="0" marL="0">
               <a:buNone/>
             </a:pPr>
             <a:r>
@@ -7785,7 +7785,7 @@
       </p:sp>
       <p:sp>
         <p:nvSpPr>
-          <p:cNvPr id="61" name="S14-figure396" descr="십 칸 틀에 4개"/>
+          <p:cNvPr id="61" name="S14-figure396" descr="1개의 십 칸 틀 중 1번째: 모두 4개"/>
           <p:cNvSpPr/>
           <p:nvPr/>
         </p:nvSpPr>
@@ -7831,7 +7831,7 @@
           <a:bodyPr wrap="square" lIns="0" tIns="0" rIns="0" bIns="0" rtlCol="0" anchor="ctr"/>
           <a:lstStyle/>
           <a:p>
-            <a:pPr algn="ctr" indent="0" marL="0">
+            <a:pPr eaLnBrk="0" algn="ctr" indent="0" marL="0">
               <a:buNone/>
             </a:pPr>
             <a:r>
@@ -8226,7 +8226,7 @@
       </p:sp>
       <p:sp>
         <p:nvSpPr>
-          <p:cNvPr id="78" name="S14-figure413" descr="십 칸 틀에 5개"/>
+          <p:cNvPr id="78" name="S14-figure413" descr="1개의 십 칸 틀 중 1번째: 모두 5개"/>
           <p:cNvSpPr/>
           <p:nvPr/>
         </p:nvSpPr>
@@ -8272,7 +8272,7 @@
           <a:bodyPr wrap="square" lIns="0" tIns="0" rIns="0" bIns="0" rtlCol="0" anchor="ctr"/>
           <a:lstStyle/>
           <a:p>
-            <a:pPr algn="ctr" indent="0" marL="0">
+            <a:pPr eaLnBrk="0" algn="ctr" indent="0" marL="0">
               <a:buNone/>
             </a:pPr>
             <a:r>
@@ -8329,7 +8329,7 @@
             </a:lvl1pPr>
           </a:lstStyle>
           <a:p>
-            <a:pPr algn="r"/>
+            <a:pPr eaLnBrk="0" algn="r"/>
             <a:fld id="{F7021451-1387-4CA6-816F-3879F97B5CBC}" type="slidenum">
               <a:rPr b="0" lang="en-US"/>
               <a:t>13</a:t>
@@ -8386,7 +8386,7 @@
           <a:bodyPr wrap="square" lIns="0" tIns="0" rIns="0" bIns="0" rtlCol="0" anchor="ctr"/>
           <a:lstStyle/>
           <a:p>
-            <a:pPr algn="l" indent="0" marL="0">
+            <a:pPr eaLnBrk="0" algn="l" indent="0" marL="0">
               <a:buNone/>
             </a:pPr>
             <a:r>
@@ -8425,7 +8425,7 @@
           <a:bodyPr wrap="square" lIns="0" tIns="0" rIns="0" bIns="0" rtlCol="0" anchor="ctr"/>
           <a:lstStyle/>
           <a:p>
-            <a:pPr algn="l" indent="0" marL="0">
+            <a:pPr eaLnBrk="0" algn="l" indent="0" marL="0">
               <a:buNone/>
             </a:pPr>
             <a:r>
@@ -8472,7 +8472,7 @@
           <a:bodyPr wrap="square" lIns="0" tIns="0" rIns="0" bIns="0" rtlCol="0" anchor="ctr"/>
           <a:lstStyle/>
           <a:p>
-            <a:pPr algn="ctr" indent="0" marL="0">
+            <a:pPr eaLnBrk="0" algn="ctr" indent="0" marL="0">
               <a:buNone/>
             </a:pPr>
             <a:r>
@@ -8917,7 +8917,7 @@
       </p:sp>
       <p:sp>
         <p:nvSpPr>
-          <p:cNvPr id="22" name="S02-figure52" descr="십 칸 틀에 7개"/>
+          <p:cNvPr id="22" name="S02-figure52" descr="1개의 십 칸 틀 중 1번째: 모두 7개"/>
           <p:cNvSpPr/>
           <p:nvPr/>
         </p:nvSpPr>
@@ -8971,7 +8971,7 @@
           <a:bodyPr wrap="square" lIns="0" tIns="0" rIns="0" bIns="0" rtlCol="0" anchor="ctr"/>
           <a:lstStyle/>
           <a:p>
-            <a:pPr algn="ctr" indent="0" marL="0">
+            <a:pPr eaLnBrk="0" algn="ctr" indent="0" marL="0">
               <a:buNone/>
             </a:pPr>
             <a:r>
@@ -9147,7 +9147,7 @@
           <a:bodyPr wrap="square" lIns="0" tIns="0" rIns="0" bIns="0" rtlCol="0" anchor="ctr"/>
           <a:lstStyle/>
           <a:p>
-            <a:pPr algn="ctr" indent="0" marL="0">
+            <a:pPr eaLnBrk="0" algn="ctr" indent="0" marL="0">
               <a:buNone/>
             </a:pPr>
             <a:r>
@@ -9186,7 +9186,7 @@
           <a:bodyPr wrap="square" lIns="0" tIns="0" rIns="0" bIns="0" rtlCol="0" anchor="ctr"/>
           <a:lstStyle/>
           <a:p>
-            <a:pPr algn="l" indent="0" marL="0">
+            <a:pPr eaLnBrk="0" algn="l" indent="0" marL="0">
               <a:buNone/>
             </a:pPr>
             <a:r>
@@ -9243,7 +9243,7 @@
             </a:lvl1pPr>
           </a:lstStyle>
           <a:p>
-            <a:pPr algn="r"/>
+            <a:pPr eaLnBrk="0" algn="r"/>
             <a:fld id="{F7021451-1387-4CA6-816F-3879F97B5CBC}" type="slidenum">
               <a:rPr b="0" lang="en-US"/>
               <a:t>2</a:t>
@@ -9300,7 +9300,7 @@
           <a:bodyPr wrap="square" lIns="0" tIns="0" rIns="0" bIns="0" rtlCol="0" anchor="ctr"/>
           <a:lstStyle/>
           <a:p>
-            <a:pPr algn="l" indent="0" marL="0">
+            <a:pPr eaLnBrk="0" algn="l" indent="0" marL="0">
               <a:buNone/>
             </a:pPr>
             <a:r>
@@ -9366,7 +9366,7 @@
           <a:bodyPr wrap="square" lIns="0" tIns="0" rIns="0" bIns="0" rtlCol="0" anchor="ctr"/>
           <a:lstStyle/>
           <a:p>
-            <a:pPr indent="0" marL="0">
+            <a:pPr eaLnBrk="0" indent="0" marL="0">
               <a:spcAft>
                 <a:spcPts val="600"/>
               </a:spcAft>
@@ -9435,7 +9435,7 @@
           <a:bodyPr wrap="square" lIns="0" tIns="0" rIns="0" bIns="0" rtlCol="0" anchor="ctr"/>
           <a:lstStyle/>
           <a:p>
-            <a:pPr indent="0" marL="0">
+            <a:pPr eaLnBrk="0" indent="0" marL="0">
               <a:spcAft>
                 <a:spcPts val="600"/>
               </a:spcAft>
@@ -9504,7 +9504,7 @@
           <a:bodyPr wrap="square" lIns="0" tIns="0" rIns="0" bIns="0" rtlCol="0" anchor="ctr"/>
           <a:lstStyle/>
           <a:p>
-            <a:pPr indent="0" marL="0">
+            <a:pPr eaLnBrk="0" indent="0" marL="0">
               <a:spcAft>
                 <a:spcPts val="600"/>
               </a:spcAft>
@@ -9594,7 +9594,7 @@
           <a:bodyPr wrap="square" lIns="0" tIns="0" rIns="0" bIns="0" rtlCol="0" anchor="ctr"/>
           <a:lstStyle/>
           <a:p>
-            <a:pPr algn="ctr" indent="0" marL="0">
+            <a:pPr eaLnBrk="0" algn="ctr" indent="0" marL="0">
               <a:buNone/>
             </a:pPr>
             <a:r>
@@ -9656,7 +9656,7 @@
           <a:bodyPr wrap="square" lIns="0" tIns="0" rIns="0" bIns="0" rtlCol="0" anchor="ctr"/>
           <a:lstStyle/>
           <a:p>
-            <a:pPr algn="ctr" indent="0" marL="0">
+            <a:pPr eaLnBrk="0" algn="ctr" indent="0" marL="0">
               <a:buNone/>
             </a:pPr>
             <a:r>
@@ -9718,7 +9718,7 @@
           <a:bodyPr wrap="square" lIns="0" tIns="0" rIns="0" bIns="0" rtlCol="0" anchor="ctr"/>
           <a:lstStyle/>
           <a:p>
-            <a:pPr algn="ctr" indent="0" marL="0">
+            <a:pPr eaLnBrk="0" algn="ctr" indent="0" marL="0">
               <a:buNone/>
             </a:pPr>
             <a:r>
@@ -9780,7 +9780,7 @@
           <a:bodyPr wrap="square" lIns="0" tIns="0" rIns="0" bIns="0" rtlCol="0" anchor="ctr"/>
           <a:lstStyle/>
           <a:p>
-            <a:pPr algn="ctr" indent="0" marL="0">
+            <a:pPr eaLnBrk="0" algn="ctr" indent="0" marL="0">
               <a:buNone/>
             </a:pPr>
             <a:r>
@@ -9842,7 +9842,7 @@
           <a:bodyPr wrap="square" lIns="0" tIns="0" rIns="0" bIns="0" rtlCol="0" anchor="ctr"/>
           <a:lstStyle/>
           <a:p>
-            <a:pPr algn="ctr" indent="0" marL="0">
+            <a:pPr eaLnBrk="0" algn="ctr" indent="0" marL="0">
               <a:buNone/>
             </a:pPr>
             <a:r>
@@ -9904,7 +9904,7 @@
           <a:bodyPr wrap="square" lIns="0" tIns="0" rIns="0" bIns="0" rtlCol="0" anchor="ctr"/>
           <a:lstStyle/>
           <a:p>
-            <a:pPr algn="ctr" indent="0" marL="0">
+            <a:pPr eaLnBrk="0" algn="ctr" indent="0" marL="0">
               <a:buNone/>
             </a:pPr>
             <a:r>
@@ -9966,7 +9966,7 @@
           <a:bodyPr wrap="square" lIns="0" tIns="0" rIns="0" bIns="0" rtlCol="0" anchor="ctr"/>
           <a:lstStyle/>
           <a:p>
-            <a:pPr algn="ctr" indent="0" marL="0">
+            <a:pPr eaLnBrk="0" algn="ctr" indent="0" marL="0">
               <a:buNone/>
             </a:pPr>
             <a:r>
@@ -10028,7 +10028,7 @@
           <a:bodyPr wrap="square" lIns="0" tIns="0" rIns="0" bIns="0" rtlCol="0" anchor="ctr"/>
           <a:lstStyle/>
           <a:p>
-            <a:pPr algn="ctr" indent="0" marL="0">
+            <a:pPr eaLnBrk="0" algn="ctr" indent="0" marL="0">
               <a:buNone/>
             </a:pPr>
             <a:r>
@@ -10090,7 +10090,7 @@
           <a:bodyPr wrap="square" lIns="0" tIns="0" rIns="0" bIns="0" rtlCol="0" anchor="ctr"/>
           <a:lstStyle/>
           <a:p>
-            <a:pPr algn="ctr" indent="0" marL="0">
+            <a:pPr eaLnBrk="0" algn="ctr" indent="0" marL="0">
               <a:buNone/>
             </a:pPr>
             <a:r>
@@ -10152,7 +10152,7 @@
           <a:bodyPr wrap="square" lIns="0" tIns="0" rIns="0" bIns="0" rtlCol="0" anchor="ctr"/>
           <a:lstStyle/>
           <a:p>
-            <a:pPr algn="ctr" indent="0" marL="0">
+            <a:pPr eaLnBrk="0" algn="ctr" indent="0" marL="0">
               <a:buNone/>
             </a:pPr>
             <a:r>
@@ -10238,7 +10238,7 @@
             </a:lvl1pPr>
           </a:lstStyle>
           <a:p>
-            <a:pPr algn="r"/>
+            <a:pPr eaLnBrk="0" algn="r"/>
             <a:fld id="{F7021451-1387-4CA6-816F-3879F97B5CBC}" type="slidenum">
               <a:rPr b="0" lang="en-US"/>
               <a:t>3</a:t>
@@ -10295,7 +10295,7 @@
           <a:bodyPr wrap="square" lIns="0" tIns="0" rIns="0" bIns="0" rtlCol="0" anchor="ctr"/>
           <a:lstStyle/>
           <a:p>
-            <a:pPr algn="l" indent="0" marL="0">
+            <a:pPr eaLnBrk="0" algn="l" indent="0" marL="0">
               <a:buNone/>
             </a:pPr>
             <a:r>
@@ -10334,7 +10334,7 @@
           <a:bodyPr wrap="square" lIns="0" tIns="0" rIns="0" bIns="0" rtlCol="0" anchor="ctr"/>
           <a:lstStyle/>
           <a:p>
-            <a:pPr algn="l" indent="0" marL="0">
+            <a:pPr eaLnBrk="0" algn="l" indent="0" marL="0">
               <a:buNone/>
             </a:pPr>
             <a:r>
@@ -10400,7 +10400,7 @@
           <a:bodyPr wrap="square" lIns="0" tIns="0" rIns="0" bIns="0" rtlCol="0" anchor="ctr"/>
           <a:lstStyle/>
           <a:p>
-            <a:pPr indent="0" marL="0">
+            <a:pPr eaLnBrk="0" indent="0" marL="0">
               <a:spcAft>
                 <a:spcPts val="600"/>
               </a:spcAft>
@@ -10773,7 +10773,7 @@
       </p:sp>
       <p:sp>
         <p:nvSpPr>
-          <p:cNvPr id="20" name="S04-figure106" descr="십 칸 틀에 4개"/>
+          <p:cNvPr id="20" name="S04-figure106" descr="1개의 십 칸 틀 중 1번째: 모두 4개"/>
           <p:cNvSpPr/>
           <p:nvPr/>
         </p:nvSpPr>
@@ -10819,7 +10819,7 @@
           <a:bodyPr wrap="square" lIns="0" tIns="0" rIns="0" bIns="0" rtlCol="0" anchor="ctr"/>
           <a:lstStyle/>
           <a:p>
-            <a:pPr algn="ctr" indent="0" marL="0">
+            <a:pPr eaLnBrk="0" algn="ctr" indent="0" marL="0">
               <a:buNone/>
             </a:pPr>
             <a:r>
@@ -11214,7 +11214,7 @@
       </p:sp>
       <p:sp>
         <p:nvSpPr>
-          <p:cNvPr id="37" name="S04-figure123" descr="십 칸 틀에 5개"/>
+          <p:cNvPr id="37" name="S04-figure123" descr="1개의 십 칸 틀 중 1번째: 모두 5개"/>
           <p:cNvSpPr/>
           <p:nvPr/>
         </p:nvSpPr>
@@ -11260,7 +11260,7 @@
           <a:bodyPr wrap="square" lIns="0" tIns="0" rIns="0" bIns="0" rtlCol="0" anchor="ctr"/>
           <a:lstStyle/>
           <a:p>
-            <a:pPr algn="ctr" indent="0" marL="0">
+            <a:pPr eaLnBrk="0" algn="ctr" indent="0" marL="0">
               <a:buNone/>
             </a:pPr>
             <a:r>
@@ -11317,7 +11317,7 @@
             </a:lvl1pPr>
           </a:lstStyle>
           <a:p>
-            <a:pPr algn="r"/>
+            <a:pPr eaLnBrk="0" algn="r"/>
             <a:fld id="{F7021451-1387-4CA6-816F-3879F97B5CBC}" type="slidenum">
               <a:rPr b="0" lang="en-US"/>
               <a:t>4</a:t>
@@ -11374,7 +11374,7 @@
           <a:bodyPr wrap="square" lIns="0" tIns="0" rIns="0" bIns="0" rtlCol="0" anchor="ctr"/>
           <a:lstStyle/>
           <a:p>
-            <a:pPr algn="l" indent="0" marL="0">
+            <a:pPr eaLnBrk="0" algn="l" indent="0" marL="0">
               <a:buNone/>
             </a:pPr>
             <a:r>
@@ -11413,7 +11413,7 @@
           <a:bodyPr wrap="square" lIns="0" tIns="0" rIns="0" bIns="0" rtlCol="0" anchor="ctr"/>
           <a:lstStyle/>
           <a:p>
-            <a:pPr algn="l" indent="0" marL="0">
+            <a:pPr eaLnBrk="0" algn="l" indent="0" marL="0">
               <a:buNone/>
             </a:pPr>
             <a:r>
@@ -11479,7 +11479,7 @@
           <a:bodyPr wrap="square" lIns="0" tIns="0" rIns="0" bIns="0" rtlCol="0" anchor="ctr"/>
           <a:lstStyle/>
           <a:p>
-            <a:pPr indent="0" marL="0">
+            <a:pPr eaLnBrk="0" indent="0" marL="0">
               <a:spcAft>
                 <a:spcPts val="600"/>
               </a:spcAft>
@@ -11852,7 +11852,7 @@
       </p:sp>
       <p:sp>
         <p:nvSpPr>
-          <p:cNvPr id="20" name="S05-figure142" descr="십 칸 틀에 4개"/>
+          <p:cNvPr id="20" name="S05-figure142" descr="1개의 십 칸 틀 중 1번째: 모두 4개"/>
           <p:cNvSpPr/>
           <p:nvPr/>
         </p:nvSpPr>
@@ -11898,7 +11898,7 @@
           <a:bodyPr wrap="square" lIns="0" tIns="0" rIns="0" bIns="0" rtlCol="0" anchor="ctr"/>
           <a:lstStyle/>
           <a:p>
-            <a:pPr algn="ctr" indent="0" marL="0">
+            <a:pPr eaLnBrk="0" algn="ctr" indent="0" marL="0">
               <a:buNone/>
             </a:pPr>
             <a:r>
@@ -12243,7 +12243,7 @@
       </p:sp>
       <p:sp>
         <p:nvSpPr>
-          <p:cNvPr id="35" name="S05-figure157" descr="십 칸 틀에 3개"/>
+          <p:cNvPr id="35" name="S05-figure157" descr="1개의 십 칸 틀 중 1번째: 모두 3개"/>
           <p:cNvSpPr/>
           <p:nvPr/>
         </p:nvSpPr>
@@ -12289,7 +12289,7 @@
           <a:bodyPr wrap="square" lIns="0" tIns="0" rIns="0" bIns="0" rtlCol="0" anchor="ctr"/>
           <a:lstStyle/>
           <a:p>
-            <a:pPr algn="ctr" indent="0" marL="0">
+            <a:pPr eaLnBrk="0" algn="ctr" indent="0" marL="0">
               <a:buNone/>
             </a:pPr>
             <a:r>
@@ -12346,7 +12346,7 @@
             </a:lvl1pPr>
           </a:lstStyle>
           <a:p>
-            <a:pPr algn="r"/>
+            <a:pPr eaLnBrk="0" algn="r"/>
             <a:fld id="{F7021451-1387-4CA6-816F-3879F97B5CBC}" type="slidenum">
               <a:rPr b="0" lang="en-US"/>
               <a:t>5</a:t>
@@ -12403,7 +12403,7 @@
           <a:bodyPr wrap="square" lIns="0" tIns="0" rIns="0" bIns="0" rtlCol="0" anchor="ctr"/>
           <a:lstStyle/>
           <a:p>
-            <a:pPr algn="l" indent="0" marL="0">
+            <a:pPr eaLnBrk="0" algn="l" indent="0" marL="0">
               <a:buNone/>
             </a:pPr>
             <a:r>
@@ -12442,7 +12442,7 @@
           <a:bodyPr wrap="square" lIns="0" tIns="0" rIns="0" bIns="0" rtlCol="0" anchor="ctr"/>
           <a:lstStyle/>
           <a:p>
-            <a:pPr algn="l" indent="0" marL="0">
+            <a:pPr eaLnBrk="0" algn="l" indent="0" marL="0">
               <a:buNone/>
             </a:pPr>
             <a:r>
@@ -12508,7 +12508,7 @@
           <a:bodyPr wrap="square" lIns="0" tIns="0" rIns="0" bIns="0" rtlCol="0" anchor="ctr"/>
           <a:lstStyle/>
           <a:p>
-            <a:pPr indent="0" marL="0">
+            <a:pPr eaLnBrk="0" indent="0" marL="0">
               <a:spcAft>
                 <a:spcPts val="600"/>
               </a:spcAft>
@@ -12577,7 +12577,7 @@
           <a:bodyPr wrap="square" lIns="0" tIns="0" rIns="0" bIns="0" rtlCol="0" anchor="ctr"/>
           <a:lstStyle/>
           <a:p>
-            <a:pPr indent="0" marL="0">
+            <a:pPr eaLnBrk="0" indent="0" marL="0">
               <a:spcAft>
                 <a:spcPts val="600"/>
               </a:spcAft>
@@ -12646,7 +12646,7 @@
           <a:bodyPr wrap="square" lIns="0" tIns="0" rIns="0" bIns="0" rtlCol="0" anchor="ctr"/>
           <a:lstStyle/>
           <a:p>
-            <a:pPr indent="0" marL="0">
+            <a:pPr eaLnBrk="0" indent="0" marL="0">
               <a:spcAft>
                 <a:spcPts val="600"/>
               </a:spcAft>
@@ -13033,7 +13033,7 @@
             </a:lvl1pPr>
           </a:lstStyle>
           <a:p>
-            <a:pPr algn="r"/>
+            <a:pPr eaLnBrk="0" algn="r"/>
             <a:fld id="{F7021451-1387-4CA6-816F-3879F97B5CBC}" type="slidenum">
               <a:rPr b="0" lang="en-US"/>
               <a:t>6</a:t>
@@ -13090,7 +13090,7 @@
           <a:bodyPr wrap="square" lIns="0" tIns="0" rIns="0" bIns="0" rtlCol="0" anchor="ctr"/>
           <a:lstStyle/>
           <a:p>
-            <a:pPr algn="l" indent="0" marL="0">
+            <a:pPr eaLnBrk="0" algn="l" indent="0" marL="0">
               <a:buNone/>
             </a:pPr>
             <a:r>
@@ -13129,7 +13129,7 @@
           <a:bodyPr wrap="square" lIns="0" tIns="0" rIns="0" bIns="0" rtlCol="0" anchor="ctr"/>
           <a:lstStyle/>
           <a:p>
-            <a:pPr algn="l" indent="0" marL="0">
+            <a:pPr eaLnBrk="0" algn="l" indent="0" marL="0">
               <a:buNone/>
             </a:pPr>
             <a:r>
@@ -13195,7 +13195,7 @@
           <a:bodyPr wrap="square" lIns="0" tIns="0" rIns="0" bIns="0" rtlCol="0" anchor="ctr"/>
           <a:lstStyle/>
           <a:p>
-            <a:pPr indent="0" marL="0">
+            <a:pPr eaLnBrk="0" indent="0" marL="0">
               <a:spcAft>
                 <a:spcPts val="600"/>
               </a:spcAft>
@@ -13245,7 +13245,7 @@
           <a:bodyPr wrap="square" lIns="0" tIns="0" rIns="0" bIns="0" rtlCol="0" anchor="ctr"/>
           <a:lstStyle/>
           <a:p>
-            <a:pPr algn="ctr" indent="0" marL="0">
+            <a:pPr eaLnBrk="0" algn="ctr" indent="0" marL="0">
               <a:buNone/>
             </a:pPr>
             <a:r>
@@ -13284,7 +13284,7 @@
           <a:bodyPr wrap="square" lIns="0" tIns="0" rIns="0" bIns="0" rtlCol="0" anchor="ctr"/>
           <a:lstStyle/>
           <a:p>
-            <a:pPr algn="l" indent="0" marL="0">
+            <a:pPr eaLnBrk="0" algn="l" indent="0" marL="0">
               <a:buNone/>
             </a:pPr>
             <a:r>
@@ -13331,7 +13331,7 @@
           <a:bodyPr wrap="square" lIns="0" tIns="0" rIns="0" bIns="0" rtlCol="0" anchor="ctr"/>
           <a:lstStyle/>
           <a:p>
-            <a:pPr algn="ctr" indent="0" marL="0">
+            <a:pPr eaLnBrk="0" algn="ctr" indent="0" marL="0">
               <a:buNone/>
             </a:pPr>
             <a:r>
@@ -13370,7 +13370,7 @@
           <a:bodyPr wrap="square" lIns="0" tIns="0" rIns="0" bIns="0" rtlCol="0" anchor="ctr"/>
           <a:lstStyle/>
           <a:p>
-            <a:pPr algn="l" indent="0" marL="0">
+            <a:pPr eaLnBrk="0" algn="l" indent="0" marL="0">
               <a:buNone/>
             </a:pPr>
             <a:r>
@@ -13417,7 +13417,7 @@
           <a:bodyPr wrap="square" lIns="0" tIns="0" rIns="0" bIns="0" rtlCol="0" anchor="ctr"/>
           <a:lstStyle/>
           <a:p>
-            <a:pPr algn="ctr" indent="0" marL="0">
+            <a:pPr eaLnBrk="0" algn="ctr" indent="0" marL="0">
               <a:buNone/>
             </a:pPr>
             <a:r>
@@ -13456,7 +13456,7 @@
           <a:bodyPr wrap="square" lIns="0" tIns="0" rIns="0" bIns="0" rtlCol="0" anchor="ctr"/>
           <a:lstStyle/>
           <a:p>
-            <a:pPr algn="l" indent="0" marL="0">
+            <a:pPr eaLnBrk="0" algn="l" indent="0" marL="0">
               <a:buNone/>
             </a:pPr>
             <a:r>
@@ -13503,7 +13503,7 @@
           <a:bodyPr wrap="square" lIns="0" tIns="0" rIns="0" bIns="0" rtlCol="0" anchor="ctr"/>
           <a:lstStyle/>
           <a:p>
-            <a:pPr algn="ctr" indent="0" marL="0">
+            <a:pPr eaLnBrk="0" algn="ctr" indent="0" marL="0">
               <a:buNone/>
             </a:pPr>
             <a:r>
@@ -13542,7 +13542,7 @@
           <a:bodyPr wrap="square" lIns="0" tIns="0" rIns="0" bIns="0" rtlCol="0" anchor="ctr"/>
           <a:lstStyle/>
           <a:p>
-            <a:pPr algn="l" indent="0" marL="0">
+            <a:pPr eaLnBrk="0" algn="l" indent="0" marL="0">
               <a:buNone/>
             </a:pPr>
             <a:r>
@@ -13599,7 +13599,7 @@
             </a:lvl1pPr>
           </a:lstStyle>
           <a:p>
-            <a:pPr algn="r"/>
+            <a:pPr eaLnBrk="0" algn="r"/>
             <a:fld id="{F7021451-1387-4CA6-816F-3879F97B5CBC}" type="slidenum">
               <a:rPr b="0" lang="en-US"/>
               <a:t>7</a:t>
@@ -13656,7 +13656,7 @@
           <a:bodyPr wrap="square" lIns="0" tIns="0" rIns="0" bIns="0" rtlCol="0" anchor="ctr"/>
           <a:lstStyle/>
           <a:p>
-            <a:pPr algn="l" indent="0" marL="0">
+            <a:pPr eaLnBrk="0" algn="l" indent="0" marL="0">
               <a:buNone/>
             </a:pPr>
             <a:r>
@@ -13722,7 +13722,7 @@
           <a:bodyPr wrap="square" lIns="0" tIns="0" rIns="0" bIns="0" rtlCol="0" anchor="ctr"/>
           <a:lstStyle/>
           <a:p>
-            <a:pPr indent="0" marL="0">
+            <a:pPr eaLnBrk="0" indent="0" marL="0">
               <a:spcAft>
                 <a:spcPts val="600"/>
               </a:spcAft>
@@ -13791,7 +13791,7 @@
           <a:bodyPr wrap="square" lIns="0" tIns="0" rIns="0" bIns="0" rtlCol="0" anchor="ctr"/>
           <a:lstStyle/>
           <a:p>
-            <a:pPr indent="0" marL="0">
+            <a:pPr eaLnBrk="0" indent="0" marL="0">
               <a:spcAft>
                 <a:spcPts val="600"/>
               </a:spcAft>
@@ -13841,7 +13841,7 @@
           <a:bodyPr wrap="square" lIns="177800" tIns="0" rIns="177800" bIns="0" rtlCol="0" anchor="ctr"/>
           <a:lstStyle/>
           <a:p>
-            <a:pPr algn="l" indent="0" marL="0">
+            <a:pPr eaLnBrk="0" algn="l" indent="0" marL="0">
               <a:buNone/>
             </a:pPr>
             <a:r>
@@ -14211,7 +14211,7 @@
       </p:sp>
       <p:sp>
         <p:nvSpPr>
-          <p:cNvPr id="22" name="S08-figure209" descr="십 칸 틀에 4개"/>
+          <p:cNvPr id="22" name="S08-figure209" descr="1개의 십 칸 틀 중 1번째: 모두 4개"/>
           <p:cNvSpPr/>
           <p:nvPr/>
         </p:nvSpPr>
@@ -14257,7 +14257,7 @@
           <a:bodyPr wrap="square" lIns="0" tIns="0" rIns="0" bIns="0" rtlCol="0" anchor="t"/>
           <a:lstStyle/>
           <a:p>
-            <a:pPr algn="l" indent="0" marL="0">
+            <a:pPr eaLnBrk="0" algn="l" indent="0" marL="0">
               <a:buNone/>
             </a:pPr>
             <a:r>
@@ -14304,7 +14304,7 @@
           <a:bodyPr wrap="square" lIns="177800" tIns="0" rIns="177800" bIns="0" rtlCol="0" anchor="ctr"/>
           <a:lstStyle/>
           <a:p>
-            <a:pPr algn="l" indent="0" marL="0">
+            <a:pPr eaLnBrk="0" algn="l" indent="0" marL="0">
               <a:buNone/>
             </a:pPr>
             <a:r>
@@ -14724,7 +14724,7 @@
       </p:sp>
       <p:sp>
         <p:nvSpPr>
-          <p:cNvPr id="41" name="S08-figure228" descr="십 칸 틀에 6개"/>
+          <p:cNvPr id="41" name="S08-figure228" descr="1개의 십 칸 틀 중 1번째: 모두 6개"/>
           <p:cNvSpPr/>
           <p:nvPr/>
         </p:nvSpPr>
@@ -14770,7 +14770,7 @@
           <a:bodyPr wrap="square" lIns="0" tIns="0" rIns="0" bIns="0" rtlCol="0" anchor="t"/>
           <a:lstStyle/>
           <a:p>
-            <a:pPr algn="l" indent="0" marL="0">
+            <a:pPr eaLnBrk="0" algn="l" indent="0" marL="0">
               <a:buNone/>
             </a:pPr>
             <a:r>
@@ -14827,7 +14827,7 @@
             </a:lvl1pPr>
           </a:lstStyle>
           <a:p>
-            <a:pPr algn="r"/>
+            <a:pPr eaLnBrk="0" algn="r"/>
             <a:fld id="{F7021451-1387-4CA6-816F-3879F97B5CBC}" type="slidenum">
               <a:rPr b="0" lang="en-US"/>
               <a:t>8</a:t>
@@ -14884,7 +14884,7 @@
           <a:bodyPr wrap="square" lIns="0" tIns="0" rIns="0" bIns="0" rtlCol="0" anchor="ctr"/>
           <a:lstStyle/>
           <a:p>
-            <a:pPr algn="l" indent="0" marL="0">
+            <a:pPr eaLnBrk="0" algn="l" indent="0" marL="0">
               <a:buNone/>
             </a:pPr>
             <a:r>
@@ -14923,7 +14923,7 @@
           <a:bodyPr wrap="square" lIns="0" tIns="0" rIns="0" bIns="0" rtlCol="0" anchor="ctr"/>
           <a:lstStyle/>
           <a:p>
-            <a:pPr algn="l" indent="0" marL="0">
+            <a:pPr eaLnBrk="0" algn="l" indent="0" marL="0">
               <a:buNone/>
             </a:pPr>
             <a:r>
@@ -14989,7 +14989,7 @@
           <a:bodyPr wrap="square" lIns="0" tIns="0" rIns="0" bIns="0" rtlCol="0" anchor="ctr"/>
           <a:lstStyle/>
           <a:p>
-            <a:pPr indent="0" marL="0">
+            <a:pPr eaLnBrk="0" indent="0" marL="0">
               <a:spcAft>
                 <a:spcPts val="600"/>
               </a:spcAft>
@@ -15058,7 +15058,7 @@
           <a:bodyPr wrap="square" lIns="0" tIns="0" rIns="0" bIns="0" rtlCol="0" anchor="t"/>
           <a:lstStyle/>
           <a:p>
-            <a:pPr indent="0" marL="0">
+            <a:pPr eaLnBrk="0" indent="0" marL="0">
               <a:spcAft>
                 <a:spcPts val="600"/>
               </a:spcAft>
@@ -15148,7 +15148,7 @@
           <a:bodyPr wrap="square" lIns="0" tIns="0" rIns="0" bIns="0" rtlCol="0" anchor="ctr"/>
           <a:lstStyle/>
           <a:p>
-            <a:pPr algn="ctr" indent="0" marL="0">
+            <a:pPr eaLnBrk="0" algn="ctr" indent="0" marL="0">
               <a:buNone/>
             </a:pPr>
             <a:r>
@@ -15210,7 +15210,7 @@
           <a:bodyPr wrap="square" lIns="0" tIns="0" rIns="0" bIns="0" rtlCol="0" anchor="ctr"/>
           <a:lstStyle/>
           <a:p>
-            <a:pPr algn="ctr" indent="0" marL="0">
+            <a:pPr eaLnBrk="0" algn="ctr" indent="0" marL="0">
               <a:buNone/>
             </a:pPr>
             <a:r>
@@ -15272,7 +15272,7 @@
           <a:bodyPr wrap="square" lIns="0" tIns="0" rIns="0" bIns="0" rtlCol="0" anchor="ctr"/>
           <a:lstStyle/>
           <a:p>
-            <a:pPr algn="ctr" indent="0" marL="0">
+            <a:pPr eaLnBrk="0" algn="ctr" indent="0" marL="0">
               <a:buNone/>
             </a:pPr>
             <a:r>
@@ -15334,7 +15334,7 @@
           <a:bodyPr wrap="square" lIns="0" tIns="0" rIns="0" bIns="0" rtlCol="0" anchor="ctr"/>
           <a:lstStyle/>
           <a:p>
-            <a:pPr algn="ctr" indent="0" marL="0">
+            <a:pPr eaLnBrk="0" algn="ctr" indent="0" marL="0">
               <a:buNone/>
             </a:pPr>
             <a:r>
@@ -15396,7 +15396,7 @@
           <a:bodyPr wrap="square" lIns="0" tIns="0" rIns="0" bIns="0" rtlCol="0" anchor="ctr"/>
           <a:lstStyle/>
           <a:p>
-            <a:pPr algn="ctr" indent="0" marL="0">
+            <a:pPr eaLnBrk="0" algn="ctr" indent="0" marL="0">
               <a:buNone/>
             </a:pPr>
             <a:r>
@@ -15458,7 +15458,7 @@
           <a:bodyPr wrap="square" lIns="0" tIns="0" rIns="0" bIns="0" rtlCol="0" anchor="ctr"/>
           <a:lstStyle/>
           <a:p>
-            <a:pPr algn="ctr" indent="0" marL="0">
+            <a:pPr eaLnBrk="0" algn="ctr" indent="0" marL="0">
               <a:buNone/>
             </a:pPr>
             <a:r>
@@ -15520,7 +15520,7 @@
           <a:bodyPr wrap="square" lIns="0" tIns="0" rIns="0" bIns="0" rtlCol="0" anchor="ctr"/>
           <a:lstStyle/>
           <a:p>
-            <a:pPr algn="ctr" indent="0" marL="0">
+            <a:pPr eaLnBrk="0" algn="ctr" indent="0" marL="0">
               <a:buNone/>
             </a:pPr>
             <a:r>
@@ -15582,7 +15582,7 @@
           <a:bodyPr wrap="square" lIns="0" tIns="0" rIns="0" bIns="0" rtlCol="0" anchor="ctr"/>
           <a:lstStyle/>
           <a:p>
-            <a:pPr algn="ctr" indent="0" marL="0">
+            <a:pPr eaLnBrk="0" algn="ctr" indent="0" marL="0">
               <a:buNone/>
             </a:pPr>
             <a:r>
@@ -15644,7 +15644,7 @@
           <a:bodyPr wrap="square" lIns="0" tIns="0" rIns="0" bIns="0" rtlCol="0" anchor="ctr"/>
           <a:lstStyle/>
           <a:p>
-            <a:pPr algn="ctr" indent="0" marL="0">
+            <a:pPr eaLnBrk="0" algn="ctr" indent="0" marL="0">
               <a:buNone/>
             </a:pPr>
             <a:r>
@@ -15706,7 +15706,7 @@
           <a:bodyPr wrap="square" lIns="0" tIns="0" rIns="0" bIns="0" rtlCol="0" anchor="ctr"/>
           <a:lstStyle/>
           <a:p>
-            <a:pPr algn="ctr" indent="0" marL="0">
+            <a:pPr eaLnBrk="0" algn="ctr" indent="0" marL="0">
               <a:buNone/>
             </a:pPr>
             <a:r>
@@ -15782,7 +15782,7 @@
           <a:bodyPr wrap="square" lIns="0" tIns="0" rIns="0" bIns="0" rtlCol="0" anchor="ctr"/>
           <a:lstStyle/>
           <a:p>
-            <a:pPr algn="ctr" indent="0" marL="0">
+            <a:pPr eaLnBrk="0" algn="ctr" indent="0" marL="0">
               <a:buNone/>
             </a:pPr>
             <a:r>
@@ -15821,7 +15821,7 @@
           <a:bodyPr wrap="square" lIns="0" tIns="0" rIns="0" bIns="0" rtlCol="0" anchor="ctr"/>
           <a:lstStyle/>
           <a:p>
-            <a:pPr algn="l" indent="0" marL="0">
+            <a:pPr eaLnBrk="0" algn="l" indent="0" marL="0">
               <a:buNone/>
             </a:pPr>
             <a:r>
@@ -15868,7 +15868,7 @@
           <a:bodyPr wrap="square" lIns="0" tIns="0" rIns="0" bIns="0" rtlCol="0" anchor="ctr"/>
           <a:lstStyle/>
           <a:p>
-            <a:pPr algn="ctr" indent="0" marL="0">
+            <a:pPr eaLnBrk="0" algn="ctr" indent="0" marL="0">
               <a:buNone/>
             </a:pPr>
             <a:r>
@@ -15907,7 +15907,7 @@
           <a:bodyPr wrap="square" lIns="0" tIns="0" rIns="0" bIns="0" rtlCol="0" anchor="ctr"/>
           <a:lstStyle/>
           <a:p>
-            <a:pPr algn="l" indent="0" marL="0">
+            <a:pPr eaLnBrk="0" algn="l" indent="0" marL="0">
               <a:buNone/>
             </a:pPr>
             <a:r>
@@ -15954,7 +15954,7 @@
           <a:bodyPr wrap="square" lIns="0" tIns="0" rIns="0" bIns="0" rtlCol="0" anchor="ctr"/>
           <a:lstStyle/>
           <a:p>
-            <a:pPr algn="ctr" indent="0" marL="0">
+            <a:pPr eaLnBrk="0" algn="ctr" indent="0" marL="0">
               <a:buNone/>
             </a:pPr>
             <a:r>
@@ -15993,7 +15993,7 @@
           <a:bodyPr wrap="square" lIns="0" tIns="0" rIns="0" bIns="0" rtlCol="0" anchor="ctr"/>
           <a:lstStyle/>
           <a:p>
-            <a:pPr algn="l" indent="0" marL="0">
+            <a:pPr eaLnBrk="0" algn="l" indent="0" marL="0">
               <a:buNone/>
             </a:pPr>
             <a:r>
@@ -16050,7 +16050,7 @@
             </a:lvl1pPr>
           </a:lstStyle>
           <a:p>
-            <a:pPr algn="r"/>
+            <a:pPr eaLnBrk="0" algn="r"/>
             <a:fld id="{F7021451-1387-4CA6-816F-3879F97B5CBC}" type="slidenum">
               <a:rPr b="0" lang="en-US"/>
               <a:t>9</a:t>

--- a/dist/초1/수학/수와연산/초1_수학_수와연산_02_수의순서와크기비교_학생용.pptx
+++ b/dist/초1/수학/수와연산/초1_수학_수와연산_02_수의순서와크기비교_학생용.pptx
@@ -119,13 +119,13 @@
   <p:extLst>
     <p:ext uri="{521415D9-36F7-43E2-AB2F-B90AF26B5E84}">
       <p14:sectionLst xmlns:p14="http://schemas.microsoft.com/office/powerpoint/2010/main">
-        <p14:section name="도입" id="{4623b66f-19cf-8157-e575-68b8f96c3cb4}">
+        <p14:section name="도입" id="{940187f0-95bd-bb2a-4dda-73a38c55c6e6}">
           <p14:sldIdLst>
             <p14:sldId id="256"/>
             <p14:sldId id="257"/>
           </p14:sldIdLst>
         </p14:section>
-        <p14:section name="개념" id="{6c6e0664-4cea-85fa-3ad7-c7d56268eb27}">
+        <p14:section name="개념" id="{759d19d8-bf37-612c-d371-6e4c91fb830d}">
           <p14:sldIdLst>
             <p14:sldId id="258"/>
             <p14:sldId id="259"/>
@@ -133,25 +133,25 @@
             <p14:sldId id="261"/>
           </p14:sldIdLst>
         </p14:section>
-        <p14:section name="연습" id="{3ca9a135-2ab5-a3ab-4a58-89ff44948e2c}">
+        <p14:section name="연습" id="{bd3cb6af-c03c-2374-e369-d14c5544e9c4}">
           <p14:sldIdLst>
             <p14:sldId id="262"/>
             <p14:sldId id="263"/>
             <p14:sldId id="264"/>
           </p14:sldIdLst>
         </p14:section>
-        <p14:section name="확인" id="{6e904aa0-d696-41aa-7e55-051eb98e9308}">
+        <p14:section name="확인" id="{e0b3bc24-085f-e4b4-3187-a2fc9503125d}">
           <p14:sldIdLst>
             <p14:sldId id="265"/>
             <p14:sldId id="266"/>
           </p14:sldIdLst>
         </p14:section>
-        <p14:section name="정리" id="{abafa961-227a-d9eb-52df-4afbc1f87b25}">
+        <p14:section name="정리" id="{84958be8-3998-2df0-5353-10a16aecee3f}">
           <p14:sldIdLst>
             <p14:sldId id="267"/>
           </p14:sldIdLst>
         </p14:section>
-        <p14:section name="보충" id="{8cecc6d0-c2ee-6965-b286-cb5c38a29499}">
+        <p14:section name="보충" id="{4b0d05f3-30d5-3b9a-bb56-209c7ab4f42b}">
           <p14:sldIdLst>
             <p14:sldId id="268"/>
           </p14:sldIdLst>
@@ -8498,56 +8498,6 @@
         </p:nvSpPr>
         <p:spPr>
           <a:xfrm>
-            <a:off x="1847088" y="2011680"/>
-            <a:ext cx="640080" cy="640080"/>
-          </a:xfrm>
-          <a:prstGeom prst="rect">
-            <a:avLst/>
-          </a:prstGeom>
-          <a:solidFill>
-            <a:srgbClr val="FFFFFF"/>
-          </a:solidFill>
-          <a:ln w="19050">
-            <a:solidFill>
-              <a:srgbClr val="1F2937"/>
-            </a:solidFill>
-            <a:prstDash val="solid"/>
-          </a:ln>
-        </p:spPr>
-      </p:sp>
-      <p:sp>
-        <p:nvSpPr>
-          <p:cNvPr id="6" name="S02-dot36"/>
-          <p:cNvSpPr/>
-          <p:nvPr/>
-        </p:nvSpPr>
-        <p:spPr>
-          <a:xfrm>
-            <a:off x="1955902" y="2120494"/>
-            <a:ext cx="422453" cy="422453"/>
-          </a:xfrm>
-          <a:prstGeom prst="ellipse">
-            <a:avLst/>
-          </a:prstGeom>
-          <a:solidFill>
-            <a:srgbClr val="E9762B"/>
-          </a:solidFill>
-          <a:ln w="12700">
-            <a:solidFill>
-              <a:srgbClr val="1F2937"/>
-            </a:solidFill>
-            <a:prstDash val="solid"/>
-          </a:ln>
-        </p:spPr>
-      </p:sp>
-      <p:sp>
-        <p:nvSpPr>
-          <p:cNvPr id="7" name="S02-cell37"/>
-          <p:cNvSpPr/>
-          <p:nvPr/>
-        </p:nvSpPr>
-        <p:spPr>
-          <a:xfrm>
             <a:off x="2487168" y="2011680"/>
             <a:ext cx="640080" cy="640080"/>
           </a:xfrm>
@@ -8567,7 +8517,7 @@
       </p:sp>
       <p:sp>
         <p:nvSpPr>
-          <p:cNvPr id="8" name="S02-dot38"/>
+          <p:cNvPr id="6" name="S02-dot36"/>
           <p:cNvSpPr/>
           <p:nvPr/>
         </p:nvSpPr>
@@ -8592,7 +8542,7 @@
       </p:sp>
       <p:sp>
         <p:nvSpPr>
-          <p:cNvPr id="9" name="S02-cell39"/>
+          <p:cNvPr id="7" name="S02-cell37"/>
           <p:cNvSpPr/>
           <p:nvPr/>
         </p:nvSpPr>
@@ -8617,7 +8567,7 @@
       </p:sp>
       <p:sp>
         <p:nvSpPr>
-          <p:cNvPr id="10" name="S02-dot40"/>
+          <p:cNvPr id="8" name="S02-dot38"/>
           <p:cNvSpPr/>
           <p:nvPr/>
         </p:nvSpPr>
@@ -8642,7 +8592,7 @@
       </p:sp>
       <p:sp>
         <p:nvSpPr>
-          <p:cNvPr id="11" name="S02-cell41"/>
+          <p:cNvPr id="9" name="S02-cell39"/>
           <p:cNvSpPr/>
           <p:nvPr/>
         </p:nvSpPr>
@@ -8667,7 +8617,7 @@
       </p:sp>
       <p:sp>
         <p:nvSpPr>
-          <p:cNvPr id="12" name="S02-dot42"/>
+          <p:cNvPr id="10" name="S02-dot40"/>
           <p:cNvSpPr/>
           <p:nvPr/>
         </p:nvSpPr>
@@ -8692,7 +8642,7 @@
       </p:sp>
       <p:sp>
         <p:nvSpPr>
-          <p:cNvPr id="13" name="S02-cell43"/>
+          <p:cNvPr id="11" name="S02-cell41"/>
           <p:cNvSpPr/>
           <p:nvPr/>
         </p:nvSpPr>
@@ -8717,7 +8667,7 @@
       </p:sp>
       <p:sp>
         <p:nvSpPr>
-          <p:cNvPr id="14" name="S02-dot44"/>
+          <p:cNvPr id="12" name="S02-dot42"/>
           <p:cNvSpPr/>
           <p:nvPr/>
         </p:nvSpPr>
@@ -8742,57 +8692,57 @@
       </p:sp>
       <p:sp>
         <p:nvSpPr>
+          <p:cNvPr id="13" name="S02-cell43"/>
+          <p:cNvSpPr/>
+          <p:nvPr/>
+        </p:nvSpPr>
+        <p:spPr>
+          <a:xfrm>
+            <a:off x="5047488" y="2011680"/>
+            <a:ext cx="640080" cy="640080"/>
+          </a:xfrm>
+          <a:prstGeom prst="rect">
+            <a:avLst/>
+          </a:prstGeom>
+          <a:solidFill>
+            <a:srgbClr val="FFFFFF"/>
+          </a:solidFill>
+          <a:ln w="19050">
+            <a:solidFill>
+              <a:srgbClr val="1F2937"/>
+            </a:solidFill>
+            <a:prstDash val="solid"/>
+          </a:ln>
+        </p:spPr>
+      </p:sp>
+      <p:sp>
+        <p:nvSpPr>
+          <p:cNvPr id="14" name="S02-dot44"/>
+          <p:cNvSpPr/>
+          <p:nvPr/>
+        </p:nvSpPr>
+        <p:spPr>
+          <a:xfrm>
+            <a:off x="5156302" y="2120494"/>
+            <a:ext cx="422453" cy="422453"/>
+          </a:xfrm>
+          <a:prstGeom prst="ellipse">
+            <a:avLst/>
+          </a:prstGeom>
+          <a:solidFill>
+            <a:srgbClr val="E9762B"/>
+          </a:solidFill>
+          <a:ln w="12700">
+            <a:solidFill>
+              <a:srgbClr val="1F2937"/>
+            </a:solidFill>
+            <a:prstDash val="solid"/>
+          </a:ln>
+        </p:spPr>
+      </p:sp>
+      <p:sp>
+        <p:nvSpPr>
           <p:cNvPr id="15" name="S02-cell45"/>
-          <p:cNvSpPr/>
-          <p:nvPr/>
-        </p:nvSpPr>
-        <p:spPr>
-          <a:xfrm>
-            <a:off x="1847088" y="2651760"/>
-            <a:ext cx="640080" cy="640080"/>
-          </a:xfrm>
-          <a:prstGeom prst="rect">
-            <a:avLst/>
-          </a:prstGeom>
-          <a:solidFill>
-            <a:srgbClr val="FFFFFF"/>
-          </a:solidFill>
-          <a:ln w="19050">
-            <a:solidFill>
-              <a:srgbClr val="1F2937"/>
-            </a:solidFill>
-            <a:prstDash val="solid"/>
-          </a:ln>
-        </p:spPr>
-      </p:sp>
-      <p:sp>
-        <p:nvSpPr>
-          <p:cNvPr id="16" name="S02-dot46"/>
-          <p:cNvSpPr/>
-          <p:nvPr/>
-        </p:nvSpPr>
-        <p:spPr>
-          <a:xfrm>
-            <a:off x="1955902" y="2760574"/>
-            <a:ext cx="422453" cy="422453"/>
-          </a:xfrm>
-          <a:prstGeom prst="ellipse">
-            <a:avLst/>
-          </a:prstGeom>
-          <a:solidFill>
-            <a:srgbClr val="E9762B"/>
-          </a:solidFill>
-          <a:ln w="12700">
-            <a:solidFill>
-              <a:srgbClr val="1F2937"/>
-            </a:solidFill>
-            <a:prstDash val="solid"/>
-          </a:ln>
-        </p:spPr>
-      </p:sp>
-      <p:sp>
-        <p:nvSpPr>
-          <p:cNvPr id="17" name="S02-cell47"/>
           <p:cNvSpPr/>
           <p:nvPr/>
         </p:nvSpPr>
@@ -8817,7 +8767,7 @@
       </p:sp>
       <p:sp>
         <p:nvSpPr>
-          <p:cNvPr id="18" name="S02-dot48"/>
+          <p:cNvPr id="16" name="S02-dot46"/>
           <p:cNvSpPr/>
           <p:nvPr/>
         </p:nvSpPr>
@@ -8842,7 +8792,7 @@
       </p:sp>
       <p:sp>
         <p:nvSpPr>
-          <p:cNvPr id="19" name="S02-cell49"/>
+          <p:cNvPr id="17" name="S02-cell47"/>
           <p:cNvSpPr/>
           <p:nvPr/>
         </p:nvSpPr>
@@ -8867,7 +8817,32 @@
       </p:sp>
       <p:sp>
         <p:nvSpPr>
-          <p:cNvPr id="20" name="S02-cell50"/>
+          <p:cNvPr id="18" name="S02-dot48"/>
+          <p:cNvSpPr/>
+          <p:nvPr/>
+        </p:nvSpPr>
+        <p:spPr>
+          <a:xfrm>
+            <a:off x="3236062" y="2760574"/>
+            <a:ext cx="422453" cy="422453"/>
+          </a:xfrm>
+          <a:prstGeom prst="ellipse">
+            <a:avLst/>
+          </a:prstGeom>
+          <a:solidFill>
+            <a:srgbClr val="E9762B"/>
+          </a:solidFill>
+          <a:ln w="12700">
+            <a:solidFill>
+              <a:srgbClr val="1F2937"/>
+            </a:solidFill>
+            <a:prstDash val="solid"/>
+          </a:ln>
+        </p:spPr>
+      </p:sp>
+      <p:sp>
+        <p:nvSpPr>
+          <p:cNvPr id="19" name="S02-cell49"/>
           <p:cNvSpPr/>
           <p:nvPr/>
         </p:nvSpPr>
@@ -8892,7 +8867,7 @@
       </p:sp>
       <p:sp>
         <p:nvSpPr>
-          <p:cNvPr id="21" name="S02-cell51"/>
+          <p:cNvPr id="20" name="S02-cell50"/>
           <p:cNvSpPr/>
           <p:nvPr/>
         </p:nvSpPr>
@@ -8917,13 +8892,38 @@
       </p:sp>
       <p:sp>
         <p:nvSpPr>
+          <p:cNvPr id="21" name="S02-cell51"/>
+          <p:cNvSpPr/>
+          <p:nvPr/>
+        </p:nvSpPr>
+        <p:spPr>
+          <a:xfrm>
+            <a:off x="5047488" y="2651760"/>
+            <a:ext cx="640080" cy="640080"/>
+          </a:xfrm>
+          <a:prstGeom prst="rect">
+            <a:avLst/>
+          </a:prstGeom>
+          <a:solidFill>
+            <a:srgbClr val="FFFFFF"/>
+          </a:solidFill>
+          <a:ln w="19050">
+            <a:solidFill>
+              <a:srgbClr val="1F2937"/>
+            </a:solidFill>
+            <a:prstDash val="solid"/>
+          </a:ln>
+        </p:spPr>
+      </p:sp>
+      <p:sp>
+        <p:nvSpPr>
           <p:cNvPr id="22" name="S02-figure52" descr="1개의 십 칸 틀 중 1번째: 모두 7개"/>
           <p:cNvSpPr/>
           <p:nvPr/>
         </p:nvSpPr>
         <p:spPr>
           <a:xfrm>
-            <a:off x="1847088" y="2011680"/>
+            <a:off x="2487168" y="2011680"/>
             <a:ext cx="3200400" cy="1280160"/>
           </a:xfrm>
           <a:prstGeom prst="rect">
@@ -8997,7 +8997,7 @@
         </p:nvSpPr>
         <p:spPr>
           <a:xfrm>
-            <a:off x="2205990" y="3902202"/>
+            <a:off x="2846070" y="3902202"/>
             <a:ext cx="425196" cy="425196"/>
           </a:xfrm>
           <a:prstGeom prst="ellipse">
@@ -9022,7 +9022,7 @@
         </p:nvSpPr>
         <p:spPr>
           <a:xfrm>
-            <a:off x="2891790" y="3902202"/>
+            <a:off x="3531870" y="3902202"/>
             <a:ext cx="425196" cy="425196"/>
           </a:xfrm>
           <a:prstGeom prst="ellipse">
@@ -9047,7 +9047,7 @@
         </p:nvSpPr>
         <p:spPr>
           <a:xfrm>
-            <a:off x="3577590" y="3902202"/>
+            <a:off x="4217670" y="3902202"/>
             <a:ext cx="425196" cy="425196"/>
           </a:xfrm>
           <a:prstGeom prst="ellipse">
@@ -9072,7 +9072,7 @@
         </p:nvSpPr>
         <p:spPr>
           <a:xfrm>
-            <a:off x="4263390" y="3902202"/>
+            <a:off x="4903470" y="3902202"/>
             <a:ext cx="425196" cy="425196"/>
           </a:xfrm>
           <a:prstGeom prst="ellipse">
@@ -9097,7 +9097,7 @@
         </p:nvSpPr>
         <p:spPr>
           <a:xfrm>
-            <a:off x="2075688" y="3771900"/>
+            <a:off x="2715768" y="3771900"/>
             <a:ext cx="2743200" cy="685800"/>
           </a:xfrm>
           <a:prstGeom prst="rect">

--- a/dist/초1/수학/수와연산/초1_수학_수와연산_02_수의순서와크기비교_학생용.pptx
+++ b/dist/초1/수학/수와연산/초1_수학_수와연산_02_수의순서와크기비교_학생용.pptx
@@ -119,13 +119,13 @@
   <p:extLst>
     <p:ext uri="{521415D9-36F7-43E2-AB2F-B90AF26B5E84}">
       <p14:sectionLst xmlns:p14="http://schemas.microsoft.com/office/powerpoint/2010/main">
-        <p14:section name="도입" id="{940187f0-95bd-bb2a-4dda-73a38c55c6e6}">
+        <p14:section name="도입" id="{48a227d8-ca4c-bcf2-de67-375d9d80539b}">
           <p14:sldIdLst>
             <p14:sldId id="256"/>
             <p14:sldId id="257"/>
           </p14:sldIdLst>
         </p14:section>
-        <p14:section name="개념" id="{759d19d8-bf37-612c-d371-6e4c91fb830d}">
+        <p14:section name="개념" id="{2bf71007-98f8-8ca1-c5e6-a6eb355e7987}">
           <p14:sldIdLst>
             <p14:sldId id="258"/>
             <p14:sldId id="259"/>
@@ -133,25 +133,25 @@
             <p14:sldId id="261"/>
           </p14:sldIdLst>
         </p14:section>
-        <p14:section name="연습" id="{bd3cb6af-c03c-2374-e369-d14c5544e9c4}">
+        <p14:section name="연습" id="{17e83c54-274c-8191-887f-3f8324688ce4}">
           <p14:sldIdLst>
             <p14:sldId id="262"/>
             <p14:sldId id="263"/>
             <p14:sldId id="264"/>
           </p14:sldIdLst>
         </p14:section>
-        <p14:section name="확인" id="{e0b3bc24-085f-e4b4-3187-a2fc9503125d}">
+        <p14:section name="확인" id="{20911892-6bc1-dea1-d82f-89b1d00cb0b8}">
           <p14:sldIdLst>
             <p14:sldId id="265"/>
             <p14:sldId id="266"/>
           </p14:sldIdLst>
         </p14:section>
-        <p14:section name="정리" id="{84958be8-3998-2df0-5353-10a16aecee3f}">
+        <p14:section name="정리" id="{dd1ed753-13a6-a134-d76f-1b8aff71b73e}">
           <p14:sldIdLst>
             <p14:sldId id="267"/>
           </p14:sldIdLst>
         </p14:section>
-        <p14:section name="보충" id="{4b0d05f3-30d5-3b9a-bb56-209c7ab4f42b}">
+        <p14:section name="보충" id="{f187d571-e0bd-610e-5122-cc8170858164}">
           <p14:sldIdLst>
             <p14:sldId id="268"/>
           </p14:sldIdLst>
@@ -2699,7 +2699,7 @@
               <a:buNone/>
             </a:pPr>
             <a:r>
-              <a:rPr lang="ko-KR" altLang="en-US" sz="5000" b="1" dirty="0">
+              <a:rPr lang="ko-KR" altLang="en-US" sz="4800" b="1" dirty="0">
                 <a:solidFill>
                   <a:srgbClr val="FFFFFF"/>
                 </a:solidFill>
